--- a/slides.pptx
+++ b/slides.pptx
@@ -5,7 +5,7 @@
     <p:sldMasterId id="2147483648" r:id="rId4"/>
   </p:sldMasterIdLst>
   <p:notesMasterIdLst>
-    <p:notesMasterId r:id="rId10"/>
+    <p:notesMasterId r:id="rId11"/>
   </p:notesMasterIdLst>
   <p:sldIdLst>
     <p:sldId id="259" r:id="rId5"/>
@@ -13,6 +13,7 @@
     <p:sldId id="257" r:id="rId7"/>
     <p:sldId id="305" r:id="rId8"/>
     <p:sldId id="306" r:id="rId9"/>
+    <p:sldId id="307" r:id="rId10"/>
   </p:sldIdLst>
   <p:sldSz cx="12192000" cy="6858000"/>
   <p:notesSz cx="6858000" cy="9144000"/>
@@ -711,7 +712,7 @@
           </a:lstStyle>
           <a:p>
             <a:fld id="{FFEE8BD1-4CD9-4E23-9BB3-F9FF5D2B01EB}" type="datetimeFigureOut">
-              <a:t>7/9/26</a:t>
+              <a:t>7/14/26</a:t>
             </a:fld>
             <a:endParaRPr lang="en-US"/>
           </a:p>
@@ -1131,7 +1132,7 @@
           <a:p>
             <a:fld id="{0C56C575-D94E-F044-B574-12900C1740FB}" type="datetimeFigureOut">
               <a:rPr lang="en-US" smtClean="0"/>
-              <a:t>7/9/26</a:t>
+              <a:t>7/14/26</a:t>
             </a:fld>
             <a:endParaRPr lang="en-US"/>
           </a:p>
@@ -1435,7 +1436,7 @@
           <a:p>
             <a:fld id="{0C56C575-D94E-F044-B574-12900C1740FB}" type="datetimeFigureOut">
               <a:rPr lang="en-US" smtClean="0"/>
-              <a:t>7/9/26</a:t>
+              <a:t>7/14/26</a:t>
             </a:fld>
             <a:endParaRPr lang="en-US"/>
           </a:p>
@@ -1633,7 +1634,7 @@
           <a:p>
             <a:fld id="{0C56C575-D94E-F044-B574-12900C1740FB}" type="datetimeFigureOut">
               <a:rPr lang="en-US" smtClean="0"/>
-              <a:t>7/9/26</a:t>
+              <a:t>7/14/26</a:t>
             </a:fld>
             <a:endParaRPr lang="en-US"/>
           </a:p>
@@ -1841,7 +1842,7 @@
           <a:p>
             <a:fld id="{0C56C575-D94E-F044-B574-12900C1740FB}" type="datetimeFigureOut">
               <a:rPr lang="en-US" smtClean="0"/>
-              <a:t>7/9/26</a:t>
+              <a:t>7/14/26</a:t>
             </a:fld>
             <a:endParaRPr lang="en-US"/>
           </a:p>
@@ -2190,7 +2191,7 @@
           <a:p>
             <a:fld id="{0C56C575-D94E-F044-B574-12900C1740FB}" type="datetimeFigureOut">
               <a:rPr lang="en-US" smtClean="0"/>
-              <a:t>7/9/26</a:t>
+              <a:t>7/14/26</a:t>
             </a:fld>
             <a:endParaRPr lang="en-US"/>
           </a:p>
@@ -2474,7 +2475,7 @@
           <a:p>
             <a:fld id="{0C56C575-D94E-F044-B574-12900C1740FB}" type="datetimeFigureOut">
               <a:rPr lang="en-US" smtClean="0"/>
-              <a:t>7/9/26</a:t>
+              <a:t>7/14/26</a:t>
             </a:fld>
             <a:endParaRPr lang="en-US"/>
           </a:p>
@@ -2853,7 +2854,7 @@
           <a:p>
             <a:fld id="{0C56C575-D94E-F044-B574-12900C1740FB}" type="datetimeFigureOut">
               <a:rPr lang="en-US" smtClean="0"/>
-              <a:t>7/9/26</a:t>
+              <a:t>7/14/26</a:t>
             </a:fld>
             <a:endParaRPr lang="en-US"/>
           </a:p>
@@ -3118,7 +3119,7 @@
           <a:p>
             <a:fld id="{0C56C575-D94E-F044-B574-12900C1740FB}" type="datetimeFigureOut">
               <a:rPr lang="en-US" smtClean="0"/>
-              <a:t>7/9/26</a:t>
+              <a:t>7/14/26</a:t>
             </a:fld>
             <a:endParaRPr lang="en-US"/>
           </a:p>
@@ -3530,7 +3531,7 @@
           <a:p>
             <a:fld id="{0C56C575-D94E-F044-B574-12900C1740FB}" type="datetimeFigureOut">
               <a:rPr lang="en-US" smtClean="0"/>
-              <a:t>7/9/26</a:t>
+              <a:t>7/14/26</a:t>
             </a:fld>
             <a:endParaRPr lang="en-US"/>
           </a:p>
@@ -3671,7 +3672,7 @@
           <a:p>
             <a:fld id="{0C56C575-D94E-F044-B574-12900C1740FB}" type="datetimeFigureOut">
               <a:rPr lang="en-US" smtClean="0"/>
-              <a:t>7/9/26</a:t>
+              <a:t>7/14/26</a:t>
             </a:fld>
             <a:endParaRPr lang="en-US"/>
           </a:p>
@@ -3784,7 +3785,7 @@
           <a:p>
             <a:fld id="{0C56C575-D94E-F044-B574-12900C1740FB}" type="datetimeFigureOut">
               <a:rPr lang="en-US" smtClean="0"/>
-              <a:t>7/9/26</a:t>
+              <a:t>7/14/26</a:t>
             </a:fld>
             <a:endParaRPr lang="en-US"/>
           </a:p>
@@ -4111,7 +4112,7 @@
           <a:p>
             <a:fld id="{0C56C575-D94E-F044-B574-12900C1740FB}" type="datetimeFigureOut">
               <a:rPr lang="en-US" smtClean="0"/>
-              <a:t>7/9/26</a:t>
+              <a:t>7/14/26</a:t>
             </a:fld>
             <a:endParaRPr lang="en-US"/>
           </a:p>
@@ -4352,7 +4353,7 @@
           <a:p>
             <a:fld id="{0C56C575-D94E-F044-B574-12900C1740FB}" type="datetimeFigureOut">
               <a:rPr lang="en-US" smtClean="0"/>
-              <a:t>7/9/26</a:t>
+              <a:t>7/14/26</a:t>
             </a:fld>
             <a:endParaRPr lang="en-US"/>
           </a:p>
@@ -5779,6 +5780,102 @@
     <p:extLst>
       <p:ext uri="{BB962C8B-B14F-4D97-AF65-F5344CB8AC3E}">
         <p14:creationId xmlns:p14="http://schemas.microsoft.com/office/powerpoint/2010/main" val="4285256136"/>
+      </p:ext>
+    </p:extLst>
+  </p:cSld>
+  <p:clrMapOvr>
+    <a:masterClrMapping/>
+  </p:clrMapOvr>
+</p:sld>
+</file>
+
+<file path=ppt/slides/slide6.xml><?xml version="1.0" encoding="utf-8"?>
+<p:sld xmlns:a="http://schemas.openxmlformats.org/drawingml/2006/main" xmlns:r="http://schemas.openxmlformats.org/officeDocument/2006/relationships" xmlns:p="http://schemas.openxmlformats.org/presentationml/2006/main">
+  <p:cSld>
+    <p:spTree>
+      <p:nvGrpSpPr>
+        <p:cNvPr id="1" name=""/>
+        <p:cNvGrpSpPr/>
+        <p:nvPr/>
+      </p:nvGrpSpPr>
+      <p:grpSpPr>
+        <a:xfrm>
+          <a:off x="0" y="0"/>
+          <a:ext cx="0" cy="0"/>
+          <a:chOff x="0" y="0"/>
+          <a:chExt cx="0" cy="0"/>
+        </a:xfrm>
+      </p:grpSpPr>
+      <p:sp>
+        <p:nvSpPr>
+          <p:cNvPr id="2" name="Title 1">
+            <a:extLst>
+              <a:ext uri="{FF2B5EF4-FFF2-40B4-BE49-F238E27FC236}">
+                <a16:creationId xmlns:a16="http://schemas.microsoft.com/office/drawing/2014/main" id="{35BD5C75-E1CE-44CC-166F-1B5D9F748CA2}"/>
+              </a:ext>
+            </a:extLst>
+          </p:cNvPr>
+          <p:cNvSpPr>
+            <a:spLocks noGrp="1"/>
+          </p:cNvSpPr>
+          <p:nvPr>
+            <p:ph type="title"/>
+          </p:nvPr>
+        </p:nvSpPr>
+        <p:spPr>
+          <a:xfrm>
+            <a:off x="838200" y="243205"/>
+            <a:ext cx="10515600" cy="899795"/>
+          </a:xfrm>
+        </p:spPr>
+        <p:txBody>
+          <a:bodyPr anchor="ctr">
+            <a:normAutofit/>
+          </a:bodyPr>
+          <a:lstStyle/>
+          <a:p>
+            <a:r>
+              <a:rPr lang="en-US" dirty="0"/>
+              <a:t>Feedback</a:t>
+            </a:r>
+          </a:p>
+        </p:txBody>
+      </p:sp>
+      <p:pic>
+        <p:nvPicPr>
+          <p:cNvPr id="5" name="Picture 4">
+            <a:extLst>
+              <a:ext uri="{FF2B5EF4-FFF2-40B4-BE49-F238E27FC236}">
+                <a16:creationId xmlns:a16="http://schemas.microsoft.com/office/drawing/2014/main" id="{97CD6FCA-198E-EF70-2C00-E788888290D5}"/>
+              </a:ext>
+            </a:extLst>
+          </p:cNvPr>
+          <p:cNvPicPr>
+            <a:picLocks noChangeAspect="1"/>
+          </p:cNvPicPr>
+          <p:nvPr/>
+        </p:nvPicPr>
+        <p:blipFill>
+          <a:blip r:embed="rId2"/>
+          <a:stretch>
+            <a:fillRect/>
+          </a:stretch>
+        </p:blipFill>
+        <p:spPr>
+          <a:xfrm>
+            <a:off x="3744118" y="723294"/>
+            <a:ext cx="5453670" cy="5453670"/>
+          </a:xfrm>
+          <a:prstGeom prst="rect">
+            <a:avLst/>
+          </a:prstGeom>
+          <a:noFill/>
+        </p:spPr>
+      </p:pic>
+    </p:spTree>
+    <p:extLst>
+      <p:ext uri="{BB962C8B-B14F-4D97-AF65-F5344CB8AC3E}">
+        <p14:creationId xmlns:p14="http://schemas.microsoft.com/office/powerpoint/2010/main" val="3562717724"/>
       </p:ext>
     </p:extLst>
   </p:cSld>
@@ -6399,18 +6496,6 @@
 </file>
 
 <file path=customXml/item1.xml><?xml version="1.0" encoding="utf-8"?>
-<p:properties xmlns:p="http://schemas.microsoft.com/office/2006/metadata/properties" xmlns:xsi="http://www.w3.org/2001/XMLSchema-instance" xmlns:pc="http://schemas.microsoft.com/office/infopath/2007/PartnerControls">
-  <documentManagement>
-    <Notes xmlns="2abaa01e-9938-407e-aa0b-10580c653abd" xsi:nil="true"/>
-    <TaxCatchAll xmlns="efce84db-8738-4c7b-9bdc-65b9500871f6" xsi:nil="true"/>
-    <lcf76f155ced4ddcb4097134ff3c332f xmlns="2abaa01e-9938-407e-aa0b-10580c653abd">
-      <Terms xmlns="http://schemas.microsoft.com/office/infopath/2007/PartnerControls"/>
-    </lcf76f155ced4ddcb4097134ff3c332f>
-  </documentManagement>
-</p:properties>
-</file>
-
-<file path=customXml/item2.xml><?xml version="1.0" encoding="utf-8"?>
 <ct:contentTypeSchema xmlns:ct="http://schemas.microsoft.com/office/2006/metadata/contentType" xmlns:ma="http://schemas.microsoft.com/office/2006/metadata/properties/metaAttributes" ct:_="" ma:_="" ma:contentTypeName="Document" ma:contentTypeID="0x010100A0BC9924B2BE754D9B1ADDA1D4CEDCCC" ma:contentTypeVersion="19" ma:contentTypeDescription="Create a new document." ma:contentTypeScope="" ma:versionID="7b22c85b2f8f6a1c666a353fcbffedd6">
   <xsd:schema xmlns:xsd="http://www.w3.org/2001/XMLSchema" xmlns:xs="http://www.w3.org/2001/XMLSchema" xmlns:p="http://schemas.microsoft.com/office/2006/metadata/properties" xmlns:ns2="2abaa01e-9938-407e-aa0b-10580c653abd" xmlns:ns3="7be34c64-93b8-4842-bfae-c3106b8c53c2" xmlns:ns4="efce84db-8738-4c7b-9bdc-65b9500871f6" targetNamespace="http://schemas.microsoft.com/office/2006/metadata/properties" ma:root="true" ma:fieldsID="f5169a24320b7be6acaef9b01dd42178" ns2:_="" ns3:_="" ns4:_="">
     <xsd:import namespace="2abaa01e-9938-407e-aa0b-10580c653abd"/>
@@ -6672,6 +6757,18 @@
 </ct:contentTypeSchema>
 </file>
 
+<file path=customXml/item2.xml><?xml version="1.0" encoding="utf-8"?>
+<p:properties xmlns:p="http://schemas.microsoft.com/office/2006/metadata/properties" xmlns:xsi="http://www.w3.org/2001/XMLSchema-instance" xmlns:pc="http://schemas.microsoft.com/office/infopath/2007/PartnerControls">
+  <documentManagement>
+    <Notes xmlns="2abaa01e-9938-407e-aa0b-10580c653abd" xsi:nil="true"/>
+    <TaxCatchAll xmlns="efce84db-8738-4c7b-9bdc-65b9500871f6" xsi:nil="true"/>
+    <lcf76f155ced4ddcb4097134ff3c332f xmlns="2abaa01e-9938-407e-aa0b-10580c653abd">
+      <Terms xmlns="http://schemas.microsoft.com/office/infopath/2007/PartnerControls"/>
+    </lcf76f155ced4ddcb4097134ff3c332f>
+  </documentManagement>
+</p:properties>
+</file>
+
 <file path=customXml/item3.xml><?xml version="1.0" encoding="utf-8"?>
 <?mso-contentType ?>
 <FormTemplates xmlns="http://schemas.microsoft.com/sharepoint/v3/contenttype/forms">
@@ -6682,17 +6779,6 @@
 </file>
 
 <file path=customXml/itemProps1.xml><?xml version="1.0" encoding="utf-8"?>
-<ds:datastoreItem xmlns:ds="http://schemas.openxmlformats.org/officeDocument/2006/customXml" ds:itemID="{3BE9614C-AFF3-4042-B96A-BCA0CA447D5C}">
-  <ds:schemaRefs>
-    <ds:schemaRef ds:uri="2abaa01e-9938-407e-aa0b-10580c653abd"/>
-    <ds:schemaRef ds:uri="efce84db-8738-4c7b-9bdc-65b9500871f6"/>
-    <ds:schemaRef ds:uri="http://schemas.microsoft.com/office/2006/metadata/properties"/>
-    <ds:schemaRef ds:uri="http://schemas.microsoft.com/office/infopath/2007/PartnerControls"/>
-  </ds:schemaRefs>
-</ds:datastoreItem>
-</file>
-
-<file path=customXml/itemProps2.xml><?xml version="1.0" encoding="utf-8"?>
 <ds:datastoreItem xmlns:ds="http://schemas.openxmlformats.org/officeDocument/2006/customXml" ds:itemID="{9504B126-1B3A-4D06-B784-5ACB07A3D410}">
   <ds:schemaRefs>
     <ds:schemaRef ds:uri="2abaa01e-9938-407e-aa0b-10580c653abd"/>
@@ -6712,6 +6798,17 @@
 </ds:datastoreItem>
 </file>
 
+<file path=customXml/itemProps2.xml><?xml version="1.0" encoding="utf-8"?>
+<ds:datastoreItem xmlns:ds="http://schemas.openxmlformats.org/officeDocument/2006/customXml" ds:itemID="{3BE9614C-AFF3-4042-B96A-BCA0CA447D5C}">
+  <ds:schemaRefs>
+    <ds:schemaRef ds:uri="2abaa01e-9938-407e-aa0b-10580c653abd"/>
+    <ds:schemaRef ds:uri="efce84db-8738-4c7b-9bdc-65b9500871f6"/>
+    <ds:schemaRef ds:uri="http://schemas.microsoft.com/office/2006/metadata/properties"/>
+    <ds:schemaRef ds:uri="http://schemas.microsoft.com/office/infopath/2007/PartnerControls"/>
+  </ds:schemaRefs>
+</ds:datastoreItem>
+</file>
+
 <file path=customXml/itemProps3.xml><?xml version="1.0" encoding="utf-8"?>
 <ds:datastoreItem xmlns:ds="http://schemas.openxmlformats.org/officeDocument/2006/customXml" ds:itemID="{D2D699D9-1B31-4616-8FB0-B4CEE1C49142}">
   <ds:schemaRefs>
